--- a/deliverables/aaar_poster_2026/aaar_practice_2026-10-15_no_notes.pptx
+++ b/deliverables/aaar_poster_2026/aaar_practice_2026-10-15_no_notes.pptx
@@ -3948,14 +3948,14 @@
               </a:defRPr>
             </a:pPr>
             <a:r>
-              <a:t>Addis spectra also carry a strong silicate dust band that IMPROVE filters lack</a:t>
+              <a:t>FTIR under-reads more as filters get heavier, and Addis filters are heavier still</a:t>
             </a:r>
           </a:p>
         </p:txBody>
       </p:sp>
       <p:pic>
         <p:nvPicPr>
-          <p:cNvPr id="3" name="Picture 2" descr="f5_addis_vs_improve_spectra.png"/>
+          <p:cNvPr id="3" name="Picture 2" descr="f5_ratio_vs_loading.png"/>
           <p:cNvPicPr>
             <a:picLocks noChangeAspect="1"/>
           </p:cNvPicPr>
@@ -3969,8 +3969,8 @@
         </p:blipFill>
         <p:spPr>
           <a:xfrm>
-            <a:off x="518007" y="1143000"/>
-            <a:ext cx="11155680" cy="4056610"/>
+            <a:off x="715910" y="1143000"/>
+            <a:ext cx="10759873" cy="5486400"/>
           </a:xfrm>
           <a:prstGeom prst="rect">
             <a:avLst/>
@@ -4093,7 +4093,7 @@
               </a:defRPr>
             </a:pPr>
             <a:r>
-              <a:t>Addis filters are far more heavily loaded and dustier than the calibration set.</a:t>
+              <a:t>FTIR under-reads more as loading rises, and Addis filters are far more heavily loaded than the calibration set.</a:t>
             </a:r>
           </a:p>
           <a:p>

--- a/deliverables/aaar_poster_2026/aaar_practice_2026-10-15_no_notes.pptx
+++ b/deliverables/aaar_poster_2026/aaar_practice_2026-10-15_no_notes.pptx
@@ -3871,14 +3871,14 @@
               </a:defRPr>
             </a:pPr>
             <a:r>
-              <a:t>Addis filters carry about 9 times more EC per filter than a typical IMPROVE filter</a:t>
+              <a:t>Addis filters are extreme in two ways: far heavier and far more EC-rich than US filters</a:t>
             </a:r>
           </a:p>
         </p:txBody>
       </p:sp>
       <p:pic>
         <p:nvPicPr>
-          <p:cNvPr id="3" name="Picture 2" descr="f4_loading_per_filter.png"/>
+          <p:cNvPr id="3" name="Picture 2" descr="f4_addis_extremes.png"/>
           <p:cNvPicPr>
             <a:picLocks noChangeAspect="1"/>
           </p:cNvPicPr>
@@ -3893,7 +3893,7 @@
         <p:spPr>
           <a:xfrm>
             <a:off x="518007" y="1143000"/>
-            <a:ext cx="11155680" cy="4933443"/>
+            <a:ext cx="11155680" cy="4301898"/>
           </a:xfrm>
           <a:prstGeom prst="rect">
             <a:avLst/>
@@ -3948,14 +3948,14 @@
               </a:defRPr>
             </a:pPr>
             <a:r>
-              <a:t>FTIR under-reads more as filters get heavier, and Addis filters are heavier still</a:t>
+              <a:t>FTIR under-reads EC on EC-rich US filters, and Addis is more EC-rich than almost all of them</a:t>
             </a:r>
           </a:p>
         </p:txBody>
       </p:sp>
       <p:pic>
         <p:nvPicPr>
-          <p:cNvPr id="3" name="Picture 2" descr="f5_ratio_vs_loading.png"/>
+          <p:cNvPr id="3" name="Picture 2" descr="f5_ratio_vs_ocec.png"/>
           <p:cNvPicPr>
             <a:picLocks noChangeAspect="1"/>
           </p:cNvPicPr>
@@ -4093,7 +4093,7 @@
               </a:defRPr>
             </a:pPr>
             <a:r>
-              <a:t>FTIR under-reads more as loading rises, and Addis filters are far more heavily loaded than the calibration set.</a:t>
+              <a:t>FTIR under-reads EC-rich filters, and Addis filters are heavier and more EC-rich than almost any US filter.</a:t>
             </a:r>
           </a:p>
           <a:p>

--- a/deliverables/aaar_poster_2026/aaar_practice_2026-10-15_no_notes.pptx
+++ b/deliverables/aaar_poster_2026/aaar_practice_2026-10-15_no_notes.pptx
@@ -13,6 +13,7 @@
     <p:sldId id="261" r:id="rId13"/>
     <p:sldId id="262" r:id="rId14"/>
     <p:sldId id="263" r:id="rId15"/>
+    <p:sldId id="264" r:id="rId16"/>
   </p:sldIdLst>
   <p:sldSz cx="12191695" cy="6858000" type="screen4x3"/>
   <p:notesSz cx="6858000" cy="9144000"/>
@@ -3570,7 +3571,7 @@
       </p:sp>
       <p:pic>
         <p:nvPicPr>
-          <p:cNvPr id="3" name="Picture 2" descr="f6_addis_chemistry.png"/>
+          <p:cNvPr id="3" name="Picture 2" descr="f7_addis_chemistry.png"/>
           <p:cNvPicPr>
             <a:picLocks noChangeAspect="1"/>
           </p:cNvPicPr>
@@ -3871,14 +3872,14 @@
               </a:defRPr>
             </a:pPr>
             <a:r>
-              <a:t>Addis filters are extreme in two ways: far heavier and far more EC-rich than US filters</a:t>
+              <a:t>Addis filters carry about 9 times more EC per filter than a typical IMPROVE filter</a:t>
             </a:r>
           </a:p>
         </p:txBody>
       </p:sp>
       <p:pic>
         <p:nvPicPr>
-          <p:cNvPr id="3" name="Picture 2" descr="f4_addis_extremes.png"/>
+          <p:cNvPr id="3" name="Picture 2" descr="f4_loading_per_filter.png"/>
           <p:cNvPicPr>
             <a:picLocks noChangeAspect="1"/>
           </p:cNvPicPr>
@@ -3893,7 +3894,7 @@
         <p:spPr>
           <a:xfrm>
             <a:off x="518007" y="1143000"/>
-            <a:ext cx="11155680" cy="4301898"/>
+            <a:ext cx="11155680" cy="4933443"/>
           </a:xfrm>
           <a:prstGeom prst="rect">
             <a:avLst/>
@@ -3948,14 +3949,91 @@
               </a:defRPr>
             </a:pPr>
             <a:r>
-              <a:t>FTIR under-reads EC on EC-rich US filters, and Addis is more EC-rich than almost all of them</a:t>
+              <a:t>Addis is more EC-rich than every IMPROVE site, and 31 of 32 SPARTAN sites sit below the typical US site</a:t>
             </a:r>
           </a:p>
         </p:txBody>
       </p:sp>
       <p:pic>
         <p:nvPicPr>
-          <p:cNvPr id="3" name="Picture 2" descr="f5_ratio_vs_ocec.png"/>
+          <p:cNvPr id="3" name="Picture 2" descr="f5_ocec_site_continuum.png"/>
+          <p:cNvPicPr>
+            <a:picLocks noChangeAspect="1"/>
+          </p:cNvPicPr>
+          <p:nvPr/>
+        </p:nvPicPr>
+        <p:blipFill>
+          <a:blip r:embed="rId2"/>
+          <a:stretch>
+            <a:fillRect/>
+          </a:stretch>
+        </p:blipFill>
+        <p:spPr>
+          <a:xfrm>
+            <a:off x="518007" y="1143000"/>
+            <a:ext cx="11155680" cy="5054415"/>
+          </a:xfrm>
+          <a:prstGeom prst="rect">
+            <a:avLst/>
+          </a:prstGeom>
+        </p:spPr>
+      </p:pic>
+    </p:spTree>
+  </p:cSld>
+  <p:clrMapOvr>
+    <a:masterClrMapping/>
+  </p:clrMapOvr>
+</p:sld>
+</file>
+
+<file path=ppt/slides/slide8.xml><?xml version="1.0" encoding="utf-8"?>
+<p:sld xmlns:a="http://schemas.openxmlformats.org/drawingml/2006/main" xmlns:p="http://schemas.openxmlformats.org/presentationml/2006/main" xmlns:r="http://schemas.openxmlformats.org/officeDocument/2006/relationships">
+  <p:cSld>
+    <p:spTree>
+      <p:nvGrpSpPr>
+        <p:cNvPr id="1" name=""/>
+        <p:cNvGrpSpPr/>
+        <p:nvPr/>
+      </p:nvGrpSpPr>
+      <p:grpSpPr/>
+      <p:sp>
+        <p:nvSpPr>
+          <p:cNvPr id="2" name="TextBox 1"/>
+          <p:cNvSpPr txBox="1"/>
+          <p:nvPr/>
+        </p:nvSpPr>
+        <p:spPr>
+          <a:xfrm>
+            <a:off x="502920" y="320040"/>
+            <a:ext cx="11155680" cy="822960"/>
+          </a:xfrm>
+          <a:prstGeom prst="rect">
+            <a:avLst/>
+          </a:prstGeom>
+          <a:noFill/>
+        </p:spPr>
+        <p:txBody>
+          <a:bodyPr wrap="square">
+            <a:spAutoFit/>
+          </a:bodyPr>
+          <a:lstStyle/>
+          <a:p>
+            <a:pPr>
+              <a:defRPr sz="2000" b="1">
+                <a:solidFill>
+                  <a:srgbClr val="22252A"/>
+                </a:solidFill>
+              </a:defRPr>
+            </a:pPr>
+            <a:r>
+              <a:t>On US filters, FTIR under-reads EC as OC/EC falls, and Addis sits further down still</a:t>
+            </a:r>
+          </a:p>
+        </p:txBody>
+      </p:sp>
+      <p:pic>
+        <p:nvPicPr>
+          <p:cNvPr id="3" name="Picture 2" descr="f6_ratio_vs_ocec.png"/>
           <p:cNvPicPr>
             <a:picLocks noChangeAspect="1"/>
           </p:cNvPicPr>
@@ -3985,7 +4063,7 @@
 </p:sld>
 </file>
 
-<file path=ppt/slides/slide8.xml><?xml version="1.0" encoding="utf-8"?>
+<file path=ppt/slides/slide9.xml><?xml version="1.0" encoding="utf-8"?>
 <p:sld xmlns:a="http://schemas.openxmlformats.org/drawingml/2006/main" xmlns:p="http://schemas.openxmlformats.org/presentationml/2006/main" xmlns:r="http://schemas.openxmlformats.org/officeDocument/2006/relationships">
   <p:cSld>
     <p:spTree>

--- a/deliverables/aaar_poster_2026/aaar_practice_2026-10-15_no_notes.pptx
+++ b/deliverables/aaar_poster_2026/aaar_practice_2026-10-15_no_notes.pptx
@@ -3949,14 +3949,14 @@
               </a:defRPr>
             </a:pPr>
             <a:r>
-              <a:t>Addis is more EC-rich than every IMPROVE site, and 31 of 32 SPARTAN sites sit below the typical US site</a:t>
+              <a:t>Addis has less organic carbon per unit of soot absorption than every IMPROVE site; 31 of 32 SPARTAN sites sit below the typical US site</a:t>
             </a:r>
           </a:p>
         </p:txBody>
       </p:sp>
       <p:pic>
         <p:nvPicPr>
-          <p:cNvPr id="3" name="Picture 2" descr="f5_ocec_site_continuum.png"/>
+          <p:cNvPr id="3" name="Picture 2" descr="f5_ocfabs_site_continuum.png"/>
           <p:cNvPicPr>
             <a:picLocks noChangeAspect="1"/>
           </p:cNvPicPr>
@@ -3970,8 +3970,8 @@
         </p:blipFill>
         <p:spPr>
           <a:xfrm>
-            <a:off x="518007" y="1143000"/>
-            <a:ext cx="11155680" cy="5054415"/>
+            <a:off x="639362" y="1143000"/>
+            <a:ext cx="10912970" cy="5486400"/>
           </a:xfrm>
           <a:prstGeom prst="rect">
             <a:avLst/>
@@ -4026,14 +4026,14 @@
               </a:defRPr>
             </a:pPr>
             <a:r>
-              <a:t>On US filters, FTIR under-reads EC as OC/EC falls, and Addis sits further down still</a:t>
+              <a:t>On US filters, FTIR under-reads EC as OC per unit absorption falls, and Addis sits further down still</a:t>
             </a:r>
           </a:p>
         </p:txBody>
       </p:sp>
       <p:pic>
         <p:nvPicPr>
-          <p:cNvPr id="3" name="Picture 2" descr="f6_ratio_vs_ocec.png"/>
+          <p:cNvPr id="3" name="Picture 2" descr="f6_ratio_vs_ocfabs.png"/>
           <p:cNvPicPr>
             <a:picLocks noChangeAspect="1"/>
           </p:cNvPicPr>
@@ -4171,7 +4171,7 @@
               </a:defRPr>
             </a:pPr>
             <a:r>
-              <a:t>FTIR under-reads EC-rich filters, and Addis filters are heavier and more EC-rich than almost any US filter.</a:t>
+              <a:t>FTIR under-reads soot-rich filters, and Addis filters are heavier and more soot-rich than any US site.</a:t>
             </a:r>
           </a:p>
           <a:p>

--- a/deliverables/aaar_poster_2026/aaar_practice_2026-10-15_no_notes.pptx
+++ b/deliverables/aaar_poster_2026/aaar_practice_2026-10-15_no_notes.pptx
@@ -14,6 +14,8 @@
     <p:sldId id="262" r:id="rId14"/>
     <p:sldId id="263" r:id="rId15"/>
     <p:sldId id="264" r:id="rId16"/>
+    <p:sldId id="265" r:id="rId17"/>
+    <p:sldId id="266" r:id="rId18"/>
   </p:sldIdLst>
   <p:sldSz cx="12191695" cy="6858000" type="screen4x3"/>
   <p:notesSz cx="6858000" cy="9144000"/>
@@ -3476,7 +3478,7 @@
               </a:defRPr>
             </a:pPr>
             <a:r>
-              <a:t>FTIR elemental carbon calibrated on US filters transfers poorly to heavily loaded, Ethiopia-like samples, in Addis Ababa and in the US network itself</a:t>
+              <a:t>FTIR elemental carbon calibrated on IMPROVE filters transfers poorly to heavily loaded samples like those in Addis Ababa, and to similar samples within IMPROVE</a:t>
             </a:r>
           </a:p>
         </p:txBody>
@@ -3512,6 +3514,234 @@
             </a:pPr>
             <a:r>
               <a:t>Ahmad Jalil, Ann M. Dillner, Satoshi Takahama  [FILL IN: affiliations, co-authors]</a:t>
+            </a:r>
+          </a:p>
+        </p:txBody>
+      </p:sp>
+    </p:spTree>
+  </p:cSld>
+  <p:clrMapOvr>
+    <a:masterClrMapping/>
+  </p:clrMapOvr>
+</p:sld>
+</file>
+
+<file path=ppt/slides/slide10.xml><?xml version="1.0" encoding="utf-8"?>
+<p:sld xmlns:a="http://schemas.openxmlformats.org/drawingml/2006/main" xmlns:p="http://schemas.openxmlformats.org/presentationml/2006/main" xmlns:r="http://schemas.openxmlformats.org/officeDocument/2006/relationships">
+  <p:cSld>
+    <p:spTree>
+      <p:nvGrpSpPr>
+        <p:cNvPr id="1" name=""/>
+        <p:cNvGrpSpPr/>
+        <p:nvPr/>
+      </p:nvGrpSpPr>
+      <p:grpSpPr/>
+      <p:sp>
+        <p:nvSpPr>
+          <p:cNvPr id="2" name="TextBox 1"/>
+          <p:cNvSpPr txBox="1"/>
+          <p:nvPr/>
+        </p:nvSpPr>
+        <p:spPr>
+          <a:xfrm>
+            <a:off x="502920" y="320040"/>
+            <a:ext cx="11155680" cy="822960"/>
+          </a:xfrm>
+          <a:prstGeom prst="rect">
+            <a:avLst/>
+          </a:prstGeom>
+          <a:noFill/>
+        </p:spPr>
+        <p:txBody>
+          <a:bodyPr wrap="square">
+            <a:spAutoFit/>
+          </a:bodyPr>
+          <a:lstStyle/>
+          <a:p>
+            <a:pPr>
+              <a:defRPr sz="2000" b="1">
+                <a:solidFill>
+                  <a:srgbClr val="22252A"/>
+                </a:solidFill>
+              </a:defRPr>
+            </a:pPr>
+            <a:r>
+              <a:t>Season-specific calibrations help in Kiremt, but not yet in the Dry or Belg seasons</a:t>
+            </a:r>
+          </a:p>
+        </p:txBody>
+      </p:sp>
+      <p:pic>
+        <p:nvPicPr>
+          <p:cNvPr id="3" name="Picture 2" descr="f8_seasonal_calibrations.png"/>
+          <p:cNvPicPr>
+            <a:picLocks noChangeAspect="1"/>
+          </p:cNvPicPr>
+          <p:nvPr/>
+        </p:nvPicPr>
+        <p:blipFill>
+          <a:blip r:embed="rId2"/>
+          <a:stretch>
+            <a:fillRect/>
+          </a:stretch>
+        </p:blipFill>
+        <p:spPr>
+          <a:xfrm>
+            <a:off x="518007" y="1143000"/>
+            <a:ext cx="11155680" cy="4063091"/>
+          </a:xfrm>
+          <a:prstGeom prst="rect">
+            <a:avLst/>
+          </a:prstGeom>
+        </p:spPr>
+      </p:pic>
+    </p:spTree>
+  </p:cSld>
+  <p:clrMapOvr>
+    <a:masterClrMapping/>
+  </p:clrMapOvr>
+</p:sld>
+</file>
+
+<file path=ppt/slides/slide11.xml><?xml version="1.0" encoding="utf-8"?>
+<p:sld xmlns:a="http://schemas.openxmlformats.org/drawingml/2006/main" xmlns:p="http://schemas.openxmlformats.org/presentationml/2006/main" xmlns:r="http://schemas.openxmlformats.org/officeDocument/2006/relationships">
+  <p:cSld>
+    <p:spTree>
+      <p:nvGrpSpPr>
+        <p:cNvPr id="1" name=""/>
+        <p:cNvGrpSpPr/>
+        <p:nvPr/>
+      </p:nvGrpSpPr>
+      <p:grpSpPr/>
+      <p:sp>
+        <p:nvSpPr>
+          <p:cNvPr id="2" name="TextBox 1"/>
+          <p:cNvSpPr txBox="1"/>
+          <p:nvPr/>
+        </p:nvSpPr>
+        <p:spPr>
+          <a:xfrm>
+            <a:off x="502920" y="320040"/>
+            <a:ext cx="11155680" cy="822960"/>
+          </a:xfrm>
+          <a:prstGeom prst="rect">
+            <a:avLst/>
+          </a:prstGeom>
+          <a:noFill/>
+        </p:spPr>
+        <p:txBody>
+          <a:bodyPr wrap="square">
+            <a:spAutoFit/>
+          </a:bodyPr>
+          <a:lstStyle/>
+          <a:p>
+            <a:pPr>
+              <a:defRPr sz="2000" b="1">
+                <a:solidFill>
+                  <a:srgbClr val="22252A"/>
+                </a:solidFill>
+              </a:defRPr>
+            </a:pPr>
+            <a:r>
+              <a:t>Conclusions</a:t>
+            </a:r>
+          </a:p>
+        </p:txBody>
+      </p:sp>
+      <p:sp>
+        <p:nvSpPr>
+          <p:cNvPr id="3" name="TextBox 2"/>
+          <p:cNvSpPr txBox="1"/>
+          <p:nvPr/>
+        </p:nvSpPr>
+        <p:spPr>
+          <a:xfrm>
+            <a:off x="822960" y="1554480"/>
+            <a:ext cx="10515600" cy="4572000"/>
+          </a:xfrm>
+          <a:prstGeom prst="rect">
+            <a:avLst/>
+          </a:prstGeom>
+          <a:noFill/>
+        </p:spPr>
+        <p:txBody>
+          <a:bodyPr wrap="square">
+            <a:spAutoFit/>
+          </a:bodyPr>
+          <a:lstStyle/>
+          <a:p>
+            <a:pPr>
+              <a:spcAft>
+                <a:spcPts val="1400"/>
+              </a:spcAft>
+              <a:defRPr sz="1600">
+                <a:solidFill>
+                  <a:srgbClr val="22252A"/>
+                </a:solidFill>
+              </a:defRPr>
+            </a:pPr>
+            <a:r>
+              <a:t>EC in Addis Ababa is very high, about 31× typical IMPROVE, and highest in the Kiremt rainy season.</a:t>
+            </a:r>
+          </a:p>
+          <a:p>
+            <a:pPr>
+              <a:spcAft>
+                <a:spcPts val="1400"/>
+              </a:spcAft>
+              <a:defRPr sz="1600">
+                <a:solidFill>
+                  <a:srgbClr val="22252A"/>
+                </a:solidFill>
+              </a:defRPr>
+            </a:pPr>
+            <a:r>
+              <a:t>Current FTIR calibrations poorly predict Addis EC, and also IMPROVE filters with Addis-like spectra.</a:t>
+            </a:r>
+          </a:p>
+          <a:p>
+            <a:pPr>
+              <a:spcAft>
+                <a:spcPts val="1400"/>
+              </a:spcAft>
+              <a:defRPr sz="1600">
+                <a:solidFill>
+                  <a:srgbClr val="22252A"/>
+                </a:solidFill>
+              </a:defRPr>
+            </a:pPr>
+            <a:r>
+              <a:t>Addis filters carry ~9× more EC than typical IMPROVE filters; most SPARTAN sites are also beyond IMPROVE.</a:t>
+            </a:r>
+          </a:p>
+          <a:p>
+            <a:pPr>
+              <a:spcAft>
+                <a:spcPts val="1400"/>
+              </a:spcAft>
+              <a:defRPr sz="1600">
+                <a:solidFill>
+                  <a:srgbClr val="22252A"/>
+                </a:solidFill>
+              </a:defRPr>
+            </a:pPr>
+            <a:r>
+              <a:t>Baseline correction helps: the Addis intercept goes from -6.1 to -1.1 µg/m³.</a:t>
+            </a:r>
+          </a:p>
+          <a:p>
+            <a:pPr>
+              <a:spcAft>
+                <a:spcPts val="1400"/>
+              </a:spcAft>
+              <a:defRPr sz="1600">
+                <a:solidFill>
+                  <a:srgbClr val="22252A"/>
+                </a:solidFill>
+              </a:defRPr>
+            </a:pPr>
+            <a:r>
+              <a:t>Season-specific calibrations help in Kiremt; a calibration explorer is helping us search for better ones.</a:t>
             </a:r>
           </a:p>
         </p:txBody>
@@ -3564,14 +3794,14 @@
               </a:defRPr>
             </a:pPr>
             <a:r>
-              <a:t>Addis Ababa PM2.5 peaks in the Kiremt rainy season; black carbon, organics and dust are each large shares</a:t>
+              <a:t>Elemental carbon in Addis Ababa is very high in every season, about 31× the typical IMPROVE level</a:t>
             </a:r>
           </a:p>
         </p:txBody>
       </p:sp>
       <p:pic>
         <p:nvPicPr>
-          <p:cNvPr id="3" name="Picture 2" descr="f7_addis_chemistry.png"/>
+          <p:cNvPr id="3" name="Picture 2" descr="f2b_addis_ec_by_season.png"/>
           <p:cNvPicPr>
             <a:picLocks noChangeAspect="1"/>
           </p:cNvPicPr>
@@ -3585,8 +3815,8 @@
         </p:blipFill>
         <p:spPr>
           <a:xfrm>
-            <a:off x="518007" y="1143000"/>
-            <a:ext cx="11155680" cy="4892728"/>
+            <a:off x="1124024" y="1143000"/>
+            <a:ext cx="9943647" cy="5486400"/>
           </a:xfrm>
           <a:prstGeom prst="rect">
             <a:avLst/>
@@ -3641,7 +3871,7 @@
               </a:defRPr>
             </a:pPr>
             <a:r>
-              <a:t>In Addis Ababa, FTIR EC tracks HIPS EC closely but on the wrong scale</a:t>
+              <a:t>In Addis Ababa, current SPARTAN FTIR EC is well correlated with HIPS EC but on the wrong scale</a:t>
             </a:r>
           </a:p>
         </p:txBody>
@@ -3718,7 +3948,7 @@
               </a:defRPr>
             </a:pPr>
             <a:r>
-              <a:t>On typical US filters the same FTIR method predicts EC well</a:t>
+              <a:t>On typical IMPROVE filters, the same FTIR method predicts EC well</a:t>
             </a:r>
           </a:p>
         </p:txBody>
@@ -3795,7 +4025,7 @@
               </a:defRPr>
             </a:pPr>
             <a:r>
-              <a:t>The same calibration under-reads the US filters whose spectra look most like Addis</a:t>
+              <a:t>Current calibrations poorly predict IMPROVE FTIR EC for spectra similar to Addis Ababa spectra</a:t>
             </a:r>
           </a:p>
         </p:txBody>
@@ -3949,14 +4179,14 @@
               </a:defRPr>
             </a:pPr>
             <a:r>
-              <a:t>Addis has less organic carbon per unit of soot absorption than every IMPROVE site; 31 of 32 SPARTAN sites sit below the typical US site</a:t>
+              <a:t>Addis Ababa EC is higher than at any IMPROVE site, and 35 of 36 SPARTAN sites sit above the typical IMPROVE site</a:t>
             </a:r>
           </a:p>
         </p:txBody>
       </p:sp>
       <p:pic>
         <p:nvPicPr>
-          <p:cNvPr id="3" name="Picture 2" descr="f5_ocfabs_site_continuum.png"/>
+          <p:cNvPr id="3" name="Picture 2" descr="f5_ec_site_continuum.png"/>
           <p:cNvPicPr>
             <a:picLocks noChangeAspect="1"/>
           </p:cNvPicPr>
@@ -3970,8 +4200,8 @@
         </p:blipFill>
         <p:spPr>
           <a:xfrm>
-            <a:off x="639362" y="1143000"/>
-            <a:ext cx="10912970" cy="5486400"/>
+            <a:off x="519702" y="1143000"/>
+            <a:ext cx="11152289" cy="5486400"/>
           </a:xfrm>
           <a:prstGeom prst="rect">
             <a:avLst/>
@@ -4026,14 +4256,14 @@
               </a:defRPr>
             </a:pPr>
             <a:r>
-              <a:t>On US filters, FTIR under-reads EC as OC per unit absorption falls, and Addis sits further down still</a:t>
+              <a:t>Baseline-correcting the spectra shrinks the Addis intercept from -6.1 to -1.1 µg/m³</a:t>
             </a:r>
           </a:p>
         </p:txBody>
       </p:sp>
       <p:pic>
         <p:nvPicPr>
-          <p:cNvPr id="3" name="Picture 2" descr="f6_ratio_vs_ocfabs.png"/>
+          <p:cNvPr id="3" name="Picture 2" descr="f6_baseline_before_after.png"/>
           <p:cNvPicPr>
             <a:picLocks noChangeAspect="1"/>
           </p:cNvPicPr>
@@ -4047,8 +4277,8 @@
         </p:blipFill>
         <p:spPr>
           <a:xfrm>
-            <a:off x="715910" y="1143000"/>
-            <a:ext cx="10759873" cy="5486400"/>
+            <a:off x="518007" y="1143000"/>
+            <a:ext cx="11155680" cy="5116645"/>
           </a:xfrm>
           <a:prstGeom prst="rect">
             <a:avLst/>
@@ -4103,94 +4333,35 @@
               </a:defRPr>
             </a:pPr>
             <a:r>
-              <a:t>Validating on the whole US network hides a calibration gap that matters for the Global South</a:t>
-            </a:r>
-          </a:p>
-        </p:txBody>
-      </p:sp>
-      <p:sp>
-        <p:nvSpPr>
-          <p:cNvPr id="3" name="TextBox 2"/>
-          <p:cNvSpPr txBox="1"/>
+              <a:t>A calibration explorer lets us evaluate thousands of calibrations to improve EC predictions</a:t>
+            </a:r>
+          </a:p>
+        </p:txBody>
+      </p:sp>
+      <p:pic>
+        <p:nvPicPr>
+          <p:cNvPr id="3" name="Picture 2" descr="f7_calibration_explorer.png"/>
+          <p:cNvPicPr>
+            <a:picLocks noChangeAspect="1"/>
+          </p:cNvPicPr>
           <p:nvPr/>
-        </p:nvSpPr>
+        </p:nvPicPr>
+        <p:blipFill>
+          <a:blip r:embed="rId2"/>
+          <a:stretch>
+            <a:fillRect/>
+          </a:stretch>
+        </p:blipFill>
         <p:spPr>
           <a:xfrm>
-            <a:off x="822960" y="1554480"/>
-            <a:ext cx="10515600" cy="4572000"/>
+            <a:off x="518007" y="1143000"/>
+            <a:ext cx="11155680" cy="4880295"/>
           </a:xfrm>
           <a:prstGeom prst="rect">
             <a:avLst/>
           </a:prstGeom>
-          <a:noFill/>
         </p:spPr>
-        <p:txBody>
-          <a:bodyPr wrap="square">
-            <a:spAutoFit/>
-          </a:bodyPr>
-          <a:lstStyle/>
-          <a:p>
-            <a:pPr>
-              <a:spcAft>
-                <a:spcPts val="1400"/>
-              </a:spcAft>
-              <a:defRPr sz="1700">
-                <a:solidFill>
-                  <a:srgbClr val="22252A"/>
-                </a:solidFill>
-              </a:defRPr>
-            </a:pPr>
-            <a:r>
-              <a:t>FTIR EC calibrated on IMPROVE works well on typical US filters.</a:t>
-            </a:r>
-          </a:p>
-          <a:p>
-            <a:pPr>
-              <a:spcAft>
-                <a:spcPts val="1400"/>
-              </a:spcAft>
-              <a:defRPr sz="1700">
-                <a:solidFill>
-                  <a:srgbClr val="22252A"/>
-                </a:solidFill>
-              </a:defRPr>
-            </a:pPr>
-            <a:r>
-              <a:t>It under-reads the US filters that look most like Addis Ababa, even though TOR and HIPS agree on them.</a:t>
-            </a:r>
-          </a:p>
-          <a:p>
-            <a:pPr>
-              <a:spcAft>
-                <a:spcPts val="1400"/>
-              </a:spcAft>
-              <a:defRPr sz="1700">
-                <a:solidFill>
-                  <a:srgbClr val="22252A"/>
-                </a:solidFill>
-              </a:defRPr>
-            </a:pPr>
-            <a:r>
-              <a:t>FTIR under-reads soot-rich filters, and Addis filters are heavier and more soot-rich than any US site.</a:t>
-            </a:r>
-          </a:p>
-          <a:p>
-            <a:pPr>
-              <a:spcAft>
-                <a:spcPts val="1400"/>
-              </a:spcAft>
-              <a:defRPr sz="1700">
-                <a:solidFill>
-                  <a:srgbClr val="22252A"/>
-                </a:solidFill>
-              </a:defRPr>
-            </a:pPr>
-            <a:r>
-              <a:t>So the Addis bias is a coverage problem that also exists inside the US network, not a quirk of one site.</a:t>
-            </a:r>
-          </a:p>
-        </p:txBody>
-      </p:sp>
+      </p:pic>
     </p:spTree>
   </p:cSld>
   <p:clrMapOvr>

--- a/deliverables/aaar_poster_2026/aaar_practice_2026-10-15_no_notes.pptx
+++ b/deliverables/aaar_poster_2026/aaar_practice_2026-10-15_no_notes.pptx
@@ -3681,7 +3681,7 @@
               </a:defRPr>
             </a:pPr>
             <a:r>
-              <a:t>EC in Addis Ababa is very high, about 31× typical IMPROVE, and highest in the Kiremt rainy season.</a:t>
+              <a:t>EC in Addis Ababa is very high, about 32× typical IMPROVE, and highest in the Kiremt rainy season.</a:t>
             </a:r>
           </a:p>
           <a:p>
@@ -3726,7 +3726,7 @@
               </a:defRPr>
             </a:pPr>
             <a:r>
-              <a:t>Baseline correction helps: the Addis intercept goes from -6.1 to -1.1 µg/m³.</a:t>
+              <a:t>Baseline correction helps: the Addis intercept goes from -6.1 to -1.2 µg/m³.</a:t>
             </a:r>
           </a:p>
           <a:p>
@@ -3794,7 +3794,7 @@
               </a:defRPr>
             </a:pPr>
             <a:r>
-              <a:t>Elemental carbon in Addis Ababa is very high in every season, about 31× the typical IMPROVE level</a:t>
+              <a:t>Elemental carbon in Addis Ababa is very high in every season, about 32× the typical IMPROVE level</a:t>
             </a:r>
           </a:p>
         </p:txBody>
@@ -3815,8 +3815,8 @@
         </p:blipFill>
         <p:spPr>
           <a:xfrm>
-            <a:off x="1124024" y="1143000"/>
-            <a:ext cx="9943647" cy="5486400"/>
+            <a:off x="1130583" y="1143000"/>
+            <a:ext cx="9930528" cy="5486400"/>
           </a:xfrm>
           <a:prstGeom prst="rect">
             <a:avLst/>
@@ -4256,7 +4256,7 @@
               </a:defRPr>
             </a:pPr>
             <a:r>
-              <a:t>Baseline-correcting the spectra shrinks the Addis intercept from -6.1 to -1.1 µg/m³</a:t>
+              <a:t>Baseline-correcting the spectra shrinks the Addis intercept from -6.1 to -1.2 µg/m³</a:t>
             </a:r>
           </a:p>
         </p:txBody>

--- a/deliverables/aaar_poster_2026/aaar_practice_2026-10-15_no_notes.pptx
+++ b/deliverables/aaar_poster_2026/aaar_practice_2026-10-15_no_notes.pptx
@@ -4179,7 +4179,7 @@
               </a:defRPr>
             </a:pPr>
             <a:r>
-              <a:t>Addis Ababa EC is higher than at any IMPROVE site, and 35 of 36 SPARTAN sites sit above the typical IMPROVE site</a:t>
+              <a:t>Addis Ababa EC is higher than at any IMPROVE site, and 28 of 29 SPARTAN sites sit above the typical IMPROVE site</a:t>
             </a:r>
           </a:p>
         </p:txBody>
@@ -4200,8 +4200,8 @@
         </p:blipFill>
         <p:spPr>
           <a:xfrm>
-            <a:off x="519702" y="1143000"/>
-            <a:ext cx="11152289" cy="5486400"/>
+            <a:off x="579532" y="1143000"/>
+            <a:ext cx="11032629" cy="5486400"/>
           </a:xfrm>
           <a:prstGeom prst="rect">
             <a:avLst/>

--- a/deliverables/aaar_poster_2026/aaar_practice_2026-10-15_no_notes.pptx
+++ b/deliverables/aaar_poster_2026/aaar_practice_2026-10-15_no_notes.pptx
@@ -3588,7 +3588,7 @@
         <p:spPr>
           <a:xfrm>
             <a:off x="518007" y="1143000"/>
-            <a:ext cx="11155680" cy="4063091"/>
+            <a:ext cx="11155680" cy="4139465"/>
           </a:xfrm>
           <a:prstGeom prst="rect">
             <a:avLst/>

--- a/deliverables/aaar_poster_2026/aaar_practice_2026-10-15_no_notes.pptx
+++ b/deliverables/aaar_poster_2026/aaar_practice_2026-10-15_no_notes.pptx
@@ -3491,8 +3491,8 @@
         </p:nvSpPr>
         <p:spPr>
           <a:xfrm>
-            <a:off x="502920" y="4023360"/>
-            <a:ext cx="10972800" cy="1097280"/>
+            <a:off x="502920" y="3886200"/>
+            <a:ext cx="11155680" cy="2377440"/>
           </a:xfrm>
           <a:prstGeom prst="rect">
             <a:avLst/>
@@ -3500,20 +3500,83 @@
           <a:noFill/>
         </p:spPr>
         <p:txBody>
-          <a:bodyPr wrap="none">
+          <a:bodyPr wrap="square">
             <a:spAutoFit/>
           </a:bodyPr>
           <a:lstStyle/>
           <a:p>
             <a:pPr>
-              <a:defRPr sz="1600">
+              <a:spcAft>
+                <a:spcPts val="800"/>
+              </a:spcAft>
+              <a:defRPr sz="1600" b="1">
                 <a:solidFill>
-                  <a:srgbClr val="8F8C84"/>
+                  <a:srgbClr val="22252A"/>
                 </a:solidFill>
               </a:defRPr>
             </a:pPr>
             <a:r>
-              <a:t>Ahmad Jalil, Ann M. Dillner, Satoshi Takahama  [FILL IN: affiliations, co-authors]</a:t>
+              <a:t>Ahmad Jalil¹,⁴, Sina Hasheminassab², Kyan Shlipak⁵,², Tesfaye Mamo Mekonnen³, Araya Asfaw³, Hossein Kazemian¹, Ann M. Dillner⁴</a:t>
+            </a:r>
+          </a:p>
+          <a:p>
+            <a:pPr>
+              <a:defRPr sz="1200">
+                <a:solidFill>
+                  <a:srgbClr val="6E6B64"/>
+                </a:solidFill>
+              </a:defRPr>
+            </a:pPr>
+            <a:r>
+              <a:t>¹ Materials Technology &amp; Environmental Research (MATTER) lab, University of Northern British Columbia, Prince George, BC, Canada</a:t>
+            </a:r>
+          </a:p>
+          <a:p>
+            <a:pPr>
+              <a:defRPr sz="1200">
+                <a:solidFill>
+                  <a:srgbClr val="6E6B64"/>
+                </a:solidFill>
+              </a:defRPr>
+            </a:pPr>
+            <a:r>
+              <a:t>² NASA Jet Propulsion Laboratory, Pasadena, CA, USA</a:t>
+            </a:r>
+          </a:p>
+          <a:p>
+            <a:pPr>
+              <a:defRPr sz="1200">
+                <a:solidFill>
+                  <a:srgbClr val="6E6B64"/>
+                </a:solidFill>
+              </a:defRPr>
+            </a:pPr>
+            <a:r>
+              <a:t>³ Addis Ababa University, Addis Ababa, Ethiopia</a:t>
+            </a:r>
+          </a:p>
+          <a:p>
+            <a:pPr>
+              <a:defRPr sz="1200">
+                <a:solidFill>
+                  <a:srgbClr val="6E6B64"/>
+                </a:solidFill>
+              </a:defRPr>
+            </a:pPr>
+            <a:r>
+              <a:t>⁴ University of California Davis, Air Quality Research Center, Davis, CA, USA</a:t>
+            </a:r>
+          </a:p>
+          <a:p>
+            <a:pPr>
+              <a:defRPr sz="1200">
+                <a:solidFill>
+                  <a:srgbClr val="6E6B64"/>
+                </a:solidFill>
+              </a:defRPr>
+            </a:pPr>
+            <a:r>
+              <a:t>⁵ Northwestern University, Evanston, IL, USA</a:t>
             </a:r>
           </a:p>
         </p:txBody>

--- a/deliverables/aaar_poster_2026/aaar_practice_2026-10-15_no_notes.pptx
+++ b/deliverables/aaar_poster_2026/aaar_practice_2026-10-15_no_notes.pptx
@@ -3651,7 +3651,7 @@
         <p:spPr>
           <a:xfrm>
             <a:off x="518007" y="1143000"/>
-            <a:ext cx="11155680" cy="4139465"/>
+            <a:ext cx="11155680" cy="4133804"/>
           </a:xfrm>
           <a:prstGeom prst="rect">
             <a:avLst/>
@@ -3759,7 +3759,7 @@
               </a:defRPr>
             </a:pPr>
             <a:r>
-              <a:t>Current FTIR calibrations poorly predict Addis EC, and also IMPROVE filters with Addis-like spectra.</a:t>
+              <a:t>Current FTIR calibrations poorly predict Addis EC, and also the IMPROVE filters whose spectra most resemble Addis.</a:t>
             </a:r>
           </a:p>
           <a:p>
@@ -3878,8 +3878,8 @@
         </p:blipFill>
         <p:spPr>
           <a:xfrm>
-            <a:off x="1130583" y="1143000"/>
-            <a:ext cx="9930528" cy="5486400"/>
+            <a:off x="518007" y="1143000"/>
+            <a:ext cx="11155680" cy="4791925"/>
           </a:xfrm>
           <a:prstGeom prst="rect">
             <a:avLst/>
@@ -3955,8 +3955,8 @@
         </p:blipFill>
         <p:spPr>
           <a:xfrm>
-            <a:off x="2952463" y="1143000"/>
-            <a:ext cx="6286768" cy="5486400"/>
+            <a:off x="2849189" y="1143000"/>
+            <a:ext cx="6493315" cy="5486400"/>
           </a:xfrm>
           <a:prstGeom prst="rect">
             <a:avLst/>
@@ -4172,7 +4172,7 @@
       </p:sp>
       <p:pic>
         <p:nvPicPr>
-          <p:cNvPr id="3" name="Picture 2" descr="f4_loading_per_filter.png"/>
+          <p:cNvPr id="3" name="Picture 2" descr="f4b_loading_per_filter_hist.png"/>
           <p:cNvPicPr>
             <a:picLocks noChangeAspect="1"/>
           </p:cNvPicPr>
@@ -4187,7 +4187,7 @@
         <p:spPr>
           <a:xfrm>
             <a:off x="518007" y="1143000"/>
-            <a:ext cx="11155680" cy="4933443"/>
+            <a:ext cx="11155680" cy="5394599"/>
           </a:xfrm>
           <a:prstGeom prst="rect">
             <a:avLst/>
@@ -4418,7 +4418,7 @@
         <p:spPr>
           <a:xfrm>
             <a:off x="518007" y="1143000"/>
-            <a:ext cx="11155680" cy="4880295"/>
+            <a:ext cx="11155680" cy="4487278"/>
           </a:xfrm>
           <a:prstGeom prst="rect">
             <a:avLst/>
